--- a/week-08/presentations/ppts/day-05-final-presentations.pptx
+++ b/week-08/presentations/ppts/day-05-final-presentations.pptx
@@ -6659,7 +6659,7 @@
             </a:pPr>
             <a:r>
               <a:rPr/>
-              <a:t>Acknowledge; reference §11 / “explicitly NOT”</a:t>
+              <a:t>Acknowledge; reference Section 11 / “explicitly NOT”</a:t>
             </a:r>
           </a:p>
           <a:p>

--- a/week-08/presentations/ppts/day-05-final-presentations.pptx
+++ b/week-08/presentations/ppts/day-05-final-presentations.pptx
@@ -5407,7 +5407,16 @@
             </a:pPr>
             <a:r>
               <a:rPr/>
-              <a:t>Artifact templates (PRD/TCD/TMD/SEP/DP/AI Spec) for use in your next role</a:t>
+              <a:t>Artifact templates — Product Requirements Document (PRD), Technical Concept Document (TCD), Technical Modeling Document (TMD), Stakeholder Engagement Plan (SEP), Delivery Plan (DP), AI Spec — for use in your next role</a:t>
+            </a:r>
+          </a:p>
+          <a:p>
+            <a:pPr lvl="0" indent="0" marL="0">
+              <a:buNone/>
+            </a:pPr>
+            <a:r>
+              <a:rPr/>
+              <a:t>Techniques — acceptance criteria (AC), non-functional requirements (NFRs), Service Level Objectives (SLOs), Azure DevOps (ADO), value stream mapping (VSM)</a:t>
             </a:r>
           </a:p>
           <a:p>

--- a/week-08/presentations/ppts/day-05-final-presentations.pptx
+++ b/week-08/presentations/ppts/day-05-final-presentations.pptx
@@ -1444,7 +1444,7 @@
             </a:pPr>
             <a:r>
               <a:rPr/>
-              <a:t>Pivot to: The Friday Rubric. Score on the rubric, not against other triads</a:t>
+              <a:t>Pivot to: The Friday Rubric. Score on the rubric, not against other quads</a:t>
             </a:r>
           </a:p>
         </p:txBody>
@@ -1690,7 +1690,7 @@
             </a:pPr>
             <a:r>
               <a:rPr/>
-              <a:t>Pivot to: The Presentations. 15 minutes + 5 Q&amp;A per triad</a:t>
+              <a:t>Pivot to: The Presentations. 15 minutes + 5 Q&amp;A per quad</a:t>
             </a:r>
           </a:p>
         </p:txBody>
@@ -4978,16 +4978,16 @@
             </a:pPr>
             <a:r>
               <a:rPr/>
-              <a:t>Score against the rubric, not against other triads</a:t>
-            </a:r>
-          </a:p>
-          <a:p>
-            <a:pPr lvl="0" indent="0" marL="0">
-              <a:buNone/>
-            </a:pPr>
-            <a:r>
-              <a:rPr/>
-              <a:t>Don’t grade on a curve. If two triads score 3.5, both are 3.5.</a:t>
+              <a:t>Score against the rubric, not against other quads</a:t>
+            </a:r>
+          </a:p>
+          <a:p>
+            <a:pPr lvl="0" indent="0" marL="0">
+              <a:buNone/>
+            </a:pPr>
+            <a:r>
+              <a:rPr/>
+              <a:t>Don’t grade on a curve. If two quads score 3.5, both are 3.5.</a:t>
             </a:r>
           </a:p>
         </p:txBody>
@@ -5963,7 +5963,7 @@
             </a:pPr>
             <a:r>
               <a:rPr/>
-              <a:t>Each triad presents their capstone (15 + 5 Q&amp;A)</a:t>
+              <a:t>Each quad presents their capstone (15 + 5 Q&amp;A)</a:t>
             </a:r>
           </a:p>
           <a:p>
@@ -6116,7 +6116,7 @@
             </a:pPr>
             <a:r>
               <a:rPr/>
-              <a:t>Triads 1 + 2 present</a:t>
+              <a:t>Quads 1 + 2 present</a:t>
             </a:r>
           </a:p>
           <a:p>
@@ -6152,7 +6152,7 @@
             </a:pPr>
             <a:r>
               <a:rPr/>
-              <a:t>Triads 3 + 4 present</a:t>
+              <a:t>Quads 3 + 4 present</a:t>
             </a:r>
           </a:p>
           <a:p>
@@ -6188,7 +6188,7 @@
             </a:pPr>
             <a:r>
               <a:rPr/>
-              <a:t>Triads 5 + 6 present</a:t>
+              <a:t>Quads 5 + 6 present</a:t>
             </a:r>
           </a:p>
           <a:p>
@@ -6299,7 +6299,7 @@
             </a:pPr>
             <a:r>
               <a:rPr b="1"/>
-              <a:t>Score on the rubric, not against other triads</a:t>
+              <a:t>Score on the rubric, not against other quads</a:t>
             </a:r>
           </a:p>
         </p:txBody>
@@ -6695,7 +6695,7 @@
             </a:pPr>
             <a:r>
               <a:rPr/>
-              <a:t>Curiosity, not defensiveness. Triads who handle Q&amp;A with curiosity score high on presentation craft.</a:t>
+              <a:t>Curiosity, not defensiveness. Quads who handle Q&amp;A with curiosity score high on presentation craft.</a:t>
             </a:r>
           </a:p>
         </p:txBody>
@@ -6770,7 +6770,7 @@
             </a:pPr>
             <a:r>
               <a:rPr b="1"/>
-              <a:t>15 minutes + 5 Q&amp;A per triad</a:t>
+              <a:t>15 minutes + 5 Q&amp;A per quad</a:t>
             </a:r>
           </a:p>
         </p:txBody>
@@ -6860,7 +6860,7 @@
             </a:pPr>
             <a:r>
               <a:rPr/>
-              <a:t>All 3 triad voices speak. Time-managed. Customer + problem grounds the rest.</a:t>
+              <a:t>All 3 quad voices speak. Time-managed. Customer + problem grounds the rest.</a:t>
             </a:r>
           </a:p>
         </p:txBody>

--- a/week-08/presentations/ppts/day-05-final-presentations.pptx
+++ b/week-08/presentations/ppts/day-05-final-presentations.pptx
@@ -6668,7 +6668,7 @@
             </a:pPr>
             <a:r>
               <a:rPr/>
-              <a:t>Acknowledge; reference Section 11 / “explicitly NOT”</a:t>
+              <a:t>Acknowledge; reference non-goals (PRD-light §3) / “explicitly NOT”</a:t>
             </a:r>
           </a:p>
           <a:p>

--- a/week-08/presentations/ppts/day-05-final-presentations.pptx
+++ b/week-08/presentations/ppts/day-05-final-presentations.pptx
@@ -5,7 +5,7 @@
     <p:sldMasterId id="2147483648" r:id="rId1"/>
   </p:sldMasterIdLst>
   <p:notesMasterIdLst>
-    <p:notesMasterId r:id="rId21"/>
+    <p:notesMasterId r:id="rId17"/>
   </p:notesMasterIdLst>
   <p:sldIdLst>
     <p:sldId id="256" r:id="rId2"/>
@@ -23,10 +23,6 @@
     <p:sldId id="268" r:id="rId14"/>
     <p:sldId id="269" r:id="rId15"/>
     <p:sldId id="270" r:id="rId16"/>
-    <p:sldId id="271" r:id="rId17"/>
-    <p:sldId id="272" r:id="rId18"/>
-    <p:sldId id="273" r:id="rId19"/>
-    <p:sldId id="274" r:id="rId20"/>
   </p:sldIdLst>
   <p:sldSz cx="9144000" cy="5143500" type="screen16x9"/>
   <p:notesSz cx="6858000" cy="9144000"/>
@@ -624,7 +620,7 @@
             </a:pPr>
             <a:r>
               <a:rPr/>
-              <a:t>Pivot to: Cohort Retrospective. 30 minutes; 3 rounds</a:t>
+              <a:t>The artifacts are reusable. The cohort is permanent.</a:t>
             </a:r>
           </a:p>
         </p:txBody>
@@ -706,7 +702,7 @@
             </a:pPr>
             <a:r>
               <a:rPr/>
-              <a:t>Instructor models the round-robin first. Specificity matters.</a:t>
+              <a:t>Each muscle gets named. Each is a thing they can name in their next interview.</a:t>
             </a:r>
           </a:p>
         </p:txBody>
@@ -788,7 +784,7 @@
             </a:pPr>
             <a:r>
               <a:rPr/>
-              <a:t>Pivot to: Course Closure. 45 minutes</a:t>
+              <a:t>End on an honest, summative tone. The work was real.</a:t>
             </a:r>
           </a:p>
         </p:txBody>
@@ -810,7 +806,7 @@
           <a:p>
             <a:fld id="{18BDFEC3-8487-43E8-A154-7C12CBC1FFF2}" type="slidenum">
               <a:rPr lang="en-US"/>
-              <a:t>13</a:t>
+              <a:t>14</a:t>
             </a:fld>
             <a:endParaRPr lang="en-US"/>
           </a:p>
@@ -870,7 +866,7 @@
             </a:pPr>
             <a:r>
               <a:rPr/>
-              <a:t>The final round-robin is the closure ritual. Instructors model first.</a:t>
+              <a:t>Open the floor. Use the prompt — “One sentence: what did the academy give you?” — to invite one short reflection per voice. Keep it tight; this is closure, not new content.</a:t>
             </a:r>
           </a:p>
         </p:txBody>
@@ -892,335 +888,7 @@
           <a:p>
             <a:fld id="{18BDFEC3-8487-43E8-A154-7C12CBC1FFF2}" type="slidenum">
               <a:rPr lang="en-US"/>
-              <a:t>14</a:t>
-            </a:fld>
-            <a:endParaRPr lang="en-US"/>
-          </a:p>
-        </p:txBody>
-      </p:sp>
-    </p:spTree>
-  </p:cSld>
-</p:notes>
-</file>
-
-<file path=ppt/notesSlides/notesSlide14.xml><?xml version="1.0" encoding="utf-8"?>
-<p:notes xmlns:a="http://schemas.openxmlformats.org/drawingml/2006/main" xmlns:r="http://schemas.openxmlformats.org/officeDocument/2006/relationships" xmlns:p="http://schemas.openxmlformats.org/presentationml/2006/main">
-  <p:cSld>
-    <p:spTree>
-      <p:nvGrpSpPr>
-        <p:cNvPr id="1" name=""/>
-        <p:cNvGrpSpPr/>
-        <p:nvPr/>
-      </p:nvGrpSpPr>
-      <p:grpSpPr>
-        <a:xfrm>
-          <a:off x="0" y="0"/>
-          <a:ext cx="0" cy="0"/>
-          <a:chOff x="0" y="0"/>
-          <a:chExt cx="0" cy="0"/>
-        </a:xfrm>
-      </p:grpSpPr>
-      <p:sp>
-        <p:nvSpPr>
-          <p:cNvPr id="2" name="Slide Image Placeholder 1"/>
-          <p:cNvSpPr>
-            <a:spLocks noGrp="1" noRot="1" noChangeAspect="1"/>
-          </p:cNvSpPr>
-          <p:nvPr>
-            <p:ph type="sldImg"/>
-          </p:nvPr>
-        </p:nvSpPr>
-        <p:spPr/>
-      </p:sp>
-      <p:sp>
-        <p:nvSpPr>
-          <p:cNvPr id="3" name="Notes Placeholder 2"/>
-          <p:cNvSpPr>
-            <a:spLocks noGrp="1"/>
-          </p:cNvSpPr>
-          <p:nvPr>
-            <p:ph type="body" idx="1"/>
-          </p:nvPr>
-        </p:nvSpPr>
-        <p:spPr/>
-        <p:txBody>
-          <a:bodyPr/>
-          <a:lstStyle/>
-          <a:p>
-            <a:pPr lvl="0" indent="0" marL="0">
-              <a:buNone/>
-            </a:pPr>
-            <a:r>
-              <a:rPr/>
-              <a:t>The artifacts are reusable. The cohort is permanent.</a:t>
-            </a:r>
-          </a:p>
-        </p:txBody>
-      </p:sp>
-      <p:sp>
-        <p:nvSpPr>
-          <p:cNvPr id="4" name="Slide Number Placeholder 3"/>
-          <p:cNvSpPr>
-            <a:spLocks noGrp="1"/>
-          </p:cNvSpPr>
-          <p:nvPr>
-            <p:ph type="sldNum" sz="quarter" idx="10"/>
-          </p:nvPr>
-        </p:nvSpPr>
-        <p:spPr/>
-        <p:txBody>
-          <a:bodyPr/>
-          <a:lstStyle/>
-          <a:p>
-            <a:fld id="{18BDFEC3-8487-43E8-A154-7C12CBC1FFF2}" type="slidenum">
-              <a:rPr lang="en-US"/>
               <a:t>15</a:t>
-            </a:fld>
-            <a:endParaRPr lang="en-US"/>
-          </a:p>
-        </p:txBody>
-      </p:sp>
-    </p:spTree>
-  </p:cSld>
-</p:notes>
-</file>
-
-<file path=ppt/notesSlides/notesSlide15.xml><?xml version="1.0" encoding="utf-8"?>
-<p:notes xmlns:a="http://schemas.openxmlformats.org/drawingml/2006/main" xmlns:r="http://schemas.openxmlformats.org/officeDocument/2006/relationships" xmlns:p="http://schemas.openxmlformats.org/presentationml/2006/main">
-  <p:cSld>
-    <p:spTree>
-      <p:nvGrpSpPr>
-        <p:cNvPr id="1" name=""/>
-        <p:cNvGrpSpPr/>
-        <p:nvPr/>
-      </p:nvGrpSpPr>
-      <p:grpSpPr>
-        <a:xfrm>
-          <a:off x="0" y="0"/>
-          <a:ext cx="0" cy="0"/>
-          <a:chOff x="0" y="0"/>
-          <a:chExt cx="0" cy="0"/>
-        </a:xfrm>
-      </p:grpSpPr>
-      <p:sp>
-        <p:nvSpPr>
-          <p:cNvPr id="2" name="Slide Image Placeholder 1"/>
-          <p:cNvSpPr>
-            <a:spLocks noGrp="1" noRot="1" noChangeAspect="1"/>
-          </p:cNvSpPr>
-          <p:nvPr>
-            <p:ph type="sldImg"/>
-          </p:nvPr>
-        </p:nvSpPr>
-        <p:spPr/>
-      </p:sp>
-      <p:sp>
-        <p:nvSpPr>
-          <p:cNvPr id="3" name="Notes Placeholder 2"/>
-          <p:cNvSpPr>
-            <a:spLocks noGrp="1"/>
-          </p:cNvSpPr>
-          <p:nvPr>
-            <p:ph type="body" idx="1"/>
-          </p:nvPr>
-        </p:nvSpPr>
-        <p:spPr/>
-        <p:txBody>
-          <a:bodyPr/>
-          <a:lstStyle/>
-          <a:p>
-            <a:pPr lvl="0" indent="0" marL="0">
-              <a:buNone/>
-            </a:pPr>
-            <a:r>
-              <a:rPr/>
-              <a:t>Each muscle gets named. Each is a thing they can name in their next interview.</a:t>
-            </a:r>
-          </a:p>
-        </p:txBody>
-      </p:sp>
-      <p:sp>
-        <p:nvSpPr>
-          <p:cNvPr id="4" name="Slide Number Placeholder 3"/>
-          <p:cNvSpPr>
-            <a:spLocks noGrp="1"/>
-          </p:cNvSpPr>
-          <p:nvPr>
-            <p:ph type="sldNum" sz="quarter" idx="10"/>
-          </p:nvPr>
-        </p:nvSpPr>
-        <p:spPr/>
-        <p:txBody>
-          <a:bodyPr/>
-          <a:lstStyle/>
-          <a:p>
-            <a:fld id="{18BDFEC3-8487-43E8-A154-7C12CBC1FFF2}" type="slidenum">
-              <a:rPr lang="en-US"/>
-              <a:t>16</a:t>
-            </a:fld>
-            <a:endParaRPr lang="en-US"/>
-          </a:p>
-        </p:txBody>
-      </p:sp>
-    </p:spTree>
-  </p:cSld>
-</p:notes>
-</file>
-
-<file path=ppt/notesSlides/notesSlide16.xml><?xml version="1.0" encoding="utf-8"?>
-<p:notes xmlns:a="http://schemas.openxmlformats.org/drawingml/2006/main" xmlns:r="http://schemas.openxmlformats.org/officeDocument/2006/relationships" xmlns:p="http://schemas.openxmlformats.org/presentationml/2006/main">
-  <p:cSld>
-    <p:spTree>
-      <p:nvGrpSpPr>
-        <p:cNvPr id="1" name=""/>
-        <p:cNvGrpSpPr/>
-        <p:nvPr/>
-      </p:nvGrpSpPr>
-      <p:grpSpPr>
-        <a:xfrm>
-          <a:off x="0" y="0"/>
-          <a:ext cx="0" cy="0"/>
-          <a:chOff x="0" y="0"/>
-          <a:chExt cx="0" cy="0"/>
-        </a:xfrm>
-      </p:grpSpPr>
-      <p:sp>
-        <p:nvSpPr>
-          <p:cNvPr id="2" name="Slide Image Placeholder 1"/>
-          <p:cNvSpPr>
-            <a:spLocks noGrp="1" noRot="1" noChangeAspect="1"/>
-          </p:cNvSpPr>
-          <p:nvPr>
-            <p:ph type="sldImg"/>
-          </p:nvPr>
-        </p:nvSpPr>
-        <p:spPr/>
-      </p:sp>
-      <p:sp>
-        <p:nvSpPr>
-          <p:cNvPr id="3" name="Notes Placeholder 2"/>
-          <p:cNvSpPr>
-            <a:spLocks noGrp="1"/>
-          </p:cNvSpPr>
-          <p:nvPr>
-            <p:ph type="body" idx="1"/>
-          </p:nvPr>
-        </p:nvSpPr>
-        <p:spPr/>
-        <p:txBody>
-          <a:bodyPr/>
-          <a:lstStyle/>
-          <a:p>
-            <a:pPr lvl="0" indent="0" marL="0">
-              <a:buNone/>
-            </a:pPr>
-            <a:r>
-              <a:rPr/>
-              <a:t>End on an honest, summative tone. The work was real.</a:t>
-            </a:r>
-          </a:p>
-        </p:txBody>
-      </p:sp>
-      <p:sp>
-        <p:nvSpPr>
-          <p:cNvPr id="4" name="Slide Number Placeholder 3"/>
-          <p:cNvSpPr>
-            <a:spLocks noGrp="1"/>
-          </p:cNvSpPr>
-          <p:nvPr>
-            <p:ph type="sldNum" sz="quarter" idx="10"/>
-          </p:nvPr>
-        </p:nvSpPr>
-        <p:spPr/>
-        <p:txBody>
-          <a:bodyPr/>
-          <a:lstStyle/>
-          <a:p>
-            <a:fld id="{18BDFEC3-8487-43E8-A154-7C12CBC1FFF2}" type="slidenum">
-              <a:rPr lang="en-US"/>
-              <a:t>18</a:t>
-            </a:fld>
-            <a:endParaRPr lang="en-US"/>
-          </a:p>
-        </p:txBody>
-      </p:sp>
-    </p:spTree>
-  </p:cSld>
-</p:notes>
-</file>
-
-<file path=ppt/notesSlides/notesSlide17.xml><?xml version="1.0" encoding="utf-8"?>
-<p:notes xmlns:a="http://schemas.openxmlformats.org/drawingml/2006/main" xmlns:r="http://schemas.openxmlformats.org/officeDocument/2006/relationships" xmlns:p="http://schemas.openxmlformats.org/presentationml/2006/main">
-  <p:cSld>
-    <p:spTree>
-      <p:nvGrpSpPr>
-        <p:cNvPr id="1" name=""/>
-        <p:cNvGrpSpPr/>
-        <p:nvPr/>
-      </p:nvGrpSpPr>
-      <p:grpSpPr>
-        <a:xfrm>
-          <a:off x="0" y="0"/>
-          <a:ext cx="0" cy="0"/>
-          <a:chOff x="0" y="0"/>
-          <a:chExt cx="0" cy="0"/>
-        </a:xfrm>
-      </p:grpSpPr>
-      <p:sp>
-        <p:nvSpPr>
-          <p:cNvPr id="2" name="Slide Image Placeholder 1"/>
-          <p:cNvSpPr>
-            <a:spLocks noGrp="1" noRot="1" noChangeAspect="1"/>
-          </p:cNvSpPr>
-          <p:nvPr>
-            <p:ph type="sldImg"/>
-          </p:nvPr>
-        </p:nvSpPr>
-        <p:spPr/>
-      </p:sp>
-      <p:sp>
-        <p:nvSpPr>
-          <p:cNvPr id="3" name="Notes Placeholder 2"/>
-          <p:cNvSpPr>
-            <a:spLocks noGrp="1"/>
-          </p:cNvSpPr>
-          <p:nvPr>
-            <p:ph type="body" idx="1"/>
-          </p:nvPr>
-        </p:nvSpPr>
-        <p:spPr/>
-        <p:txBody>
-          <a:bodyPr/>
-          <a:lstStyle/>
-          <a:p>
-            <a:pPr lvl="0" indent="0" marL="0">
-              <a:buNone/>
-            </a:pPr>
-            <a:r>
-              <a:rPr/>
-              <a:t>Open the floor. Use the prompt — “One sentence: what did the academy give you?” — to invite one short reflection per voice. Keep it tight; this is closure, not new content.</a:t>
-            </a:r>
-          </a:p>
-        </p:txBody>
-      </p:sp>
-      <p:sp>
-        <p:nvSpPr>
-          <p:cNvPr id="4" name="Slide Number Placeholder 3"/>
-          <p:cNvSpPr>
-            <a:spLocks noGrp="1"/>
-          </p:cNvSpPr>
-          <p:nvPr>
-            <p:ph type="sldNum" sz="quarter" idx="10"/>
-          </p:nvPr>
-        </p:nvSpPr>
-        <p:spPr/>
-        <p:txBody>
-          <a:bodyPr/>
-          <a:lstStyle/>
-          <a:p>
-            <a:fld id="{18BDFEC3-8487-43E8-A154-7C12CBC1FFF2}" type="slidenum">
-              <a:rPr lang="en-US"/>
-              <a:t>19</a:t>
             </a:fld>
             <a:endParaRPr lang="en-US"/>
           </a:p>
@@ -1280,7 +948,7 @@
             </a:pPr>
             <a:r>
               <a:rPr/>
-              <a:t>Each participant leaves with capstone deliverable + reflection list + Pattern Library.</a:t>
+              <a:t>Pivot to: The Friday Rubric. Score on the rubric, not against other quads</a:t>
             </a:r>
           </a:p>
         </p:txBody>
@@ -1362,7 +1030,7 @@
             </a:pPr>
             <a:r>
               <a:rPr/>
-              <a:t>Tight cadence. Hold the time strictly during presentations.</a:t>
+              <a:t>Cohort + instructors score. Whole-number scores; no half-points.</a:t>
             </a:r>
           </a:p>
         </p:txBody>
@@ -1444,7 +1112,7 @@
             </a:pPr>
             <a:r>
               <a:rPr/>
-              <a:t>Pivot to: The Friday Rubric. Score on the rubric, not against other quads</a:t>
+              <a:t>Pivot to: The Presentations. 15 minutes + 5 Q&amp;A per quad</a:t>
             </a:r>
           </a:p>
         </p:txBody>
@@ -1526,7 +1194,7 @@
             </a:pPr>
             <a:r>
               <a:rPr/>
-              <a:t>Cohort + instructors score. Whole-number scores; no half-points.</a:t>
+              <a:t>Honest scoring beats “everyone gets a B.”</a:t>
             </a:r>
           </a:p>
         </p:txBody>
@@ -1608,7 +1276,7 @@
             </a:pPr>
             <a:r>
               <a:rPr/>
-              <a:t>“I don’t know” answered well is better than a hand-wave.</a:t>
+              <a:t>Pivot to: Cohort Retrospective. 30 minutes; 3 rounds</a:t>
             </a:r>
           </a:p>
         </p:txBody>
@@ -1690,7 +1358,7 @@
             </a:pPr>
             <a:r>
               <a:rPr/>
-              <a:t>Pivot to: The Presentations. 15 minutes + 5 Q&amp;A per quad</a:t>
+              <a:t>Instructor models the round-robin first. Specificity matters.</a:t>
             </a:r>
           </a:p>
         </p:txBody>
@@ -1772,7 +1440,7 @@
             </a:pPr>
             <a:r>
               <a:rPr/>
-              <a:t>If timer is broken, that’s a presentation craft hit.</a:t>
+              <a:t>Pivot to: Course Closure. 45 minutes</a:t>
             </a:r>
           </a:p>
         </p:txBody>
@@ -1854,7 +1522,7 @@
             </a:pPr>
             <a:r>
               <a:rPr/>
-              <a:t>Honest scoring beats “everyone gets a B.”</a:t>
+              <a:t>The final round-robin is the closure ritual. Instructors model first.</a:t>
             </a:r>
           </a:p>
         </p:txBody>
@@ -4926,7 +4594,7 @@
             </a:pPr>
             <a:r>
               <a:rPr/>
-              <a:t>✅ Cohort Scoring Discipline</a:t>
+              <a:t>🏆 Closure Components</a:t>
             </a:r>
           </a:p>
         </p:txBody>
@@ -4951,43 +4619,34 @@
             </a:pPr>
             <a:r>
               <a:rPr/>
-              <a:t>Score during the presentation, not after</a:t>
-            </a:r>
-          </a:p>
-          <a:p>
-            <a:pPr lvl="0" indent="0" marL="0">
-              <a:buNone/>
-            </a:pPr>
-            <a:r>
-              <a:rPr/>
-              <a:t>Specific notes per dimension</a:t>
-            </a:r>
-          </a:p>
-          <a:p>
-            <a:pPr lvl="0" indent="0" marL="0">
-              <a:buNone/>
-            </a:pPr>
-            <a:r>
-              <a:rPr/>
-              <a:t>Whole-number scores; no half-points</a:t>
-            </a:r>
-          </a:p>
-          <a:p>
-            <a:pPr lvl="0" indent="0" marL="0">
-              <a:buNone/>
-            </a:pPr>
-            <a:r>
-              <a:rPr/>
-              <a:t>Score against the rubric, not against other quads</a:t>
-            </a:r>
-          </a:p>
-          <a:p>
-            <a:pPr lvl="0" indent="0" marL="0">
-              <a:buNone/>
-            </a:pPr>
-            <a:r>
-              <a:rPr/>
-              <a:t>Don’t grade on a curve. If two quads score 3.5, both are 3.5.</a:t>
+              <a:t>Post-assessments (15 min): PM + Data Literacy — same instruments as pre-assessments</a:t>
+            </a:r>
+          </a:p>
+          <a:p>
+            <a:pPr lvl="0" indent="0" marL="0">
+              <a:buNone/>
+            </a:pPr>
+            <a:r>
+              <a:rPr/>
+              <a:t>Certificate distribution (5 min)</a:t>
+            </a:r>
+          </a:p>
+          <a:p>
+            <a:pPr lvl="0" indent="0" marL="0">
+              <a:buNone/>
+            </a:pPr>
+            <a:r>
+              <a:rPr/>
+              <a:t>Closing words from instructors (10 min)</a:t>
+            </a:r>
+          </a:p>
+          <a:p>
+            <a:pPr lvl="0" indent="0" marL="0">
+              <a:buNone/>
+            </a:pPr>
+            <a:r>
+              <a:rPr/>
+              <a:t>Final round-robin (15 min): one sentence each on what the academy gave them</a:t>
             </a:r>
           </a:p>
         </p:txBody>
@@ -5034,7 +4693,7 @@
             </a:pPr>
             <a:r>
               <a:rPr/>
-              <a:t>Cohort Retrospective</a:t>
+              <a:t>📚 Materials You Take With You</a:t>
             </a:r>
           </a:p>
         </p:txBody>
@@ -5055,14 +4714,47 @@
           <a:lstStyle/>
           <a:p>
             <a:pPr lvl="0" indent="0" marL="0">
-              <a:spcBef>
-                <a:spcPts val="3000"/>
-              </a:spcBef>
-              <a:buNone/>
-            </a:pPr>
-            <a:r>
-              <a:rPr b="1"/>
-              <a:t>30 minutes; 3 rounds</a:t>
+              <a:buNone/>
+            </a:pPr>
+            <a:r>
+              <a:rPr/>
+              <a:t>Artifact templates — Product Requirements Document (PRD), Technical Concept Document (TCD), Technical Modeling Document (TMD), Stakeholder Engagement Plan (SEP), Delivery Plan (DP), AI Spec — for use in your next role</a:t>
+            </a:r>
+          </a:p>
+          <a:p>
+            <a:pPr lvl="0" indent="0" marL="0">
+              <a:buNone/>
+            </a:pPr>
+            <a:r>
+              <a:rPr/>
+              <a:t>Techniques — acceptance criteria (AC), non-functional requirements (NFRs), Service Level Objectives (SLOs), Azure DevOps (ADO), value stream mapping (VSM)</a:t>
+            </a:r>
+          </a:p>
+          <a:p>
+            <a:pPr lvl="0" indent="0" marL="0">
+              <a:buNone/>
+            </a:pPr>
+            <a:r>
+              <a:rPr/>
+              <a:t>Pattern Library — cumulative across Weeks 2–8</a:t>
+            </a:r>
+          </a:p>
+          <a:p>
+            <a:pPr lvl="0" indent="0" marL="0">
+              <a:buNone/>
+            </a:pPr>
+            <a:r>
+              <a:rPr/>
+              <a:t>“Next 90 days” reading list — 3–5 books / podcasts / talks</a:t>
+            </a:r>
+          </a:p>
+          <a:p>
+            <a:pPr lvl="0" indent="0" marL="0">
+              <a:buNone/>
+            </a:pPr>
+            <a:r>
+              <a:rPr/>
+              <a:t>Cohort connections for ongoing support</a:t>
             </a:r>
           </a:p>
         </p:txBody>
@@ -5109,7 +4801,7 @@
             </a:pPr>
             <a:r>
               <a:rPr/>
-              <a:t>📚 The 3 Retrospective Rounds</a:t>
+              <a:t>💪 The 5 Muscles of the Academy</a:t>
             </a:r>
           </a:p>
         </p:txBody>
@@ -5134,34 +4826,106 @@
             </a:pPr>
             <a:r>
               <a:rPr/>
-              <a:t>What surprised you? One thing each — content, process, yourself</a:t>
-            </a:r>
-          </a:p>
-          <a:p>
-            <a:pPr lvl="0" indent="0" marL="0">
-              <a:buNone/>
-            </a:pPr>
-            <a:r>
-              <a:rPr/>
-              <a:t>What muscles are you keeping? 2 muscles each</a:t>
-            </a:r>
-          </a:p>
-          <a:p>
-            <a:pPr lvl="0" indent="0" marL="0">
-              <a:buNone/>
-            </a:pPr>
-            <a:r>
-              <a:rPr/>
-              <a:t>What habit are you retiring? 1 habit each</a:t>
-            </a:r>
-          </a:p>
-          <a:p>
-            <a:pPr lvl="0" indent="0" marL="0">
-              <a:buNone/>
-            </a:pPr>
-            <a:r>
-              <a:rPr/>
-              <a:t>Three artifact lists for the cohort to take with them.</a:t>
+              <a:t>Customer-centric</a:t>
+            </a:r>
+          </a:p>
+          <a:p>
+            <a:pPr lvl="0" indent="0" marL="0">
+              <a:buNone/>
+            </a:pPr>
+            <a:r>
+              <a:rPr/>
+              <a:t>(Wk 1) Personas, pain points, problem framing</a:t>
+            </a:r>
+          </a:p>
+          <a:p>
+            <a:pPr lvl="0" indent="0" marL="0">
+              <a:buNone/>
+            </a:pPr>
+            <a:r>
+              <a:rPr/>
+              <a:t>Strategic + measurable</a:t>
+            </a:r>
+          </a:p>
+          <a:p>
+            <a:pPr lvl="0" indent="0" marL="0">
+              <a:buNone/>
+            </a:pPr>
+            <a:r>
+              <a:rPr/>
+              <a:t>(Wk 2) NS, Tier Sheet, journey, design principles</a:t>
+            </a:r>
+          </a:p>
+          <a:p>
+            <a:pPr lvl="0" indent="0" marL="0">
+              <a:buNone/>
+            </a:pPr>
+            <a:r>
+              <a:rPr/>
+              <a:t>Engineering-readable</a:t>
+            </a:r>
+          </a:p>
+          <a:p>
+            <a:pPr lvl="0" indent="0" marL="0">
+              <a:buNone/>
+            </a:pPr>
+            <a:r>
+              <a:rPr/>
+              <a:t>(Wk 3 + 8) PRDs, AC, NFRs, AI Spec</a:t>
+            </a:r>
+          </a:p>
+          <a:p>
+            <a:pPr lvl="0" indent="0" marL="0">
+              <a:buNone/>
+            </a:pPr>
+            <a:r>
+              <a:rPr/>
+              <a:t>Architecturally aware</a:t>
+            </a:r>
+          </a:p>
+          <a:p>
+            <a:pPr lvl="0" indent="0" marL="0">
+              <a:buNone/>
+            </a:pPr>
+            <a:r>
+              <a:rPr/>
+              <a:t>(Wk 4 + 5) TCD, TMD, trade-offs, SLOs, sequences</a:t>
+            </a:r>
+          </a:p>
+          <a:p>
+            <a:pPr lvl="0" indent="0" marL="0">
+              <a:buNone/>
+            </a:pPr>
+            <a:r>
+              <a:rPr/>
+              <a:t>Stakeholder-fluent</a:t>
+            </a:r>
+          </a:p>
+          <a:p>
+            <a:pPr lvl="0" indent="0" marL="0">
+              <a:buNone/>
+            </a:pPr>
+            <a:r>
+              <a:rPr/>
+              <a:t>(Wk 6) Mapping, engagement, negotiation</a:t>
+            </a:r>
+          </a:p>
+          <a:p>
+            <a:pPr lvl="0" indent="0" marL="0">
+              <a:buNone/>
+            </a:pPr>
+            <a:r>
+              <a:rPr/>
+              <a:t>Delivery-disciplined</a:t>
+            </a:r>
+          </a:p>
+          <a:p>
+            <a:pPr lvl="0" indent="0" marL="0">
+              <a:buNone/>
+            </a:pPr>
+            <a:r>
+              <a:rPr/>
+              <a:t>(Wk 7) ADO, outcome tracking, VSM, bottlenecks</a:t>
             </a:r>
           </a:p>
         </p:txBody>
@@ -5198,45 +4962,22 @@
             <p:ph type="title"/>
           </p:nvPr>
         </p:nvSpPr>
-        <p:spPr/>
-        <p:txBody>
-          <a:bodyPr/>
-          <a:lstStyle/>
-          <a:p>
-            <a:pPr lvl="0" indent="0" marL="0">
-              <a:buNone/>
-            </a:pPr>
-            <a:r>
-              <a:rPr/>
-              <a:t>Course Closure</a:t>
-            </a:r>
-          </a:p>
-        </p:txBody>
-      </p:sp>
-      <p:sp>
-        <p:nvSpPr>
-          <p:cNvPr id="3" name="Content Placeholder 2"/>
-          <p:cNvSpPr>
-            <a:spLocks noGrp="1"/>
-          </p:cNvSpPr>
-          <p:nvPr>
-            <p:ph idx="1"/>
-          </p:nvPr>
-        </p:nvSpPr>
-        <p:spPr/>
-        <p:txBody>
-          <a:bodyPr/>
-          <a:lstStyle/>
-          <a:p>
-            <a:pPr lvl="0" indent="0" marL="0">
-              <a:spcBef>
-                <a:spcPts val="3000"/>
-              </a:spcBef>
-              <a:buNone/>
-            </a:pPr>
-            <a:r>
-              <a:rPr b="1"/>
-              <a:t>45 minutes</a:t>
+        <p:spPr>
+          <a:xfrm>
+            <a:off x="722313" y="3305176"/>
+            <a:ext cx="7772400" cy="1021556"/>
+          </a:xfrm>
+        </p:spPr>
+        <p:txBody>
+          <a:bodyPr/>
+          <a:lstStyle/>
+          <a:p>
+            <a:pPr lvl="0" indent="0" marL="0">
+              <a:buNone/>
+            </a:pPr>
+            <a:r>
+              <a:rPr/>
+              <a:t>🏆 Congratulations, TPM Academy Cohort</a:t>
             </a:r>
           </a:p>
         </p:txBody>
@@ -5283,7 +5024,7 @@
             </a:pPr>
             <a:r>
               <a:rPr/>
-              <a:t>🏆 Closure Components</a:t>
+              <a:t>You shipped 5 sibling artifacts + an AI Spec + a capstone.</a:t>
             </a:r>
           </a:p>
         </p:txBody>
@@ -5304,38 +5045,14 @@
           <a:lstStyle/>
           <a:p>
             <a:pPr lvl="0" indent="0" marL="0">
-              <a:buNone/>
-            </a:pPr>
-            <a:r>
-              <a:rPr/>
-              <a:t>Post-assessments (15 min): PM + Data Literacy — same instruments as pre-assessments</a:t>
-            </a:r>
-          </a:p>
-          <a:p>
-            <a:pPr lvl="0" indent="0" marL="0">
-              <a:buNone/>
-            </a:pPr>
-            <a:r>
-              <a:rPr/>
-              <a:t>Certificate distribution (5 min)</a:t>
-            </a:r>
-          </a:p>
-          <a:p>
-            <a:pPr lvl="0" indent="0" marL="0">
-              <a:buNone/>
-            </a:pPr>
-            <a:r>
-              <a:rPr/>
-              <a:t>Closing words from instructors (10 min)</a:t>
-            </a:r>
-          </a:p>
-          <a:p>
-            <a:pPr lvl="0" indent="0" marL="0">
-              <a:buNone/>
-            </a:pPr>
-            <a:r>
-              <a:rPr/>
-              <a:t>Final round-robin (15 min): one sentence each on what the academy gave them</a:t>
+              <a:spcBef>
+                <a:spcPts val="3000"/>
+              </a:spcBef>
+              <a:buNone/>
+            </a:pPr>
+            <a:r>
+              <a:rPr b="1"/>
+              <a:t>Take the muscles. Use the templates. Keep the discipline.</a:t>
             </a:r>
           </a:p>
         </p:txBody>
@@ -5382,412 +5099,6 @@
             </a:pPr>
             <a:r>
               <a:rPr/>
-              <a:t>📚 Materials You Take With You</a:t>
-            </a:r>
-          </a:p>
-        </p:txBody>
-      </p:sp>
-      <p:sp>
-        <p:nvSpPr>
-          <p:cNvPr id="3" name="Content Placeholder 2"/>
-          <p:cNvSpPr>
-            <a:spLocks noGrp="1"/>
-          </p:cNvSpPr>
-          <p:nvPr>
-            <p:ph idx="1"/>
-          </p:nvPr>
-        </p:nvSpPr>
-        <p:spPr/>
-        <p:txBody>
-          <a:bodyPr/>
-          <a:lstStyle/>
-          <a:p>
-            <a:pPr lvl="0" indent="0" marL="0">
-              <a:buNone/>
-            </a:pPr>
-            <a:r>
-              <a:rPr/>
-              <a:t>Artifact templates — Product Requirements Document (PRD), Technical Concept Document (TCD), Technical Modeling Document (TMD), Stakeholder Engagement Plan (SEP), Delivery Plan (DP), AI Spec — for use in your next role</a:t>
-            </a:r>
-          </a:p>
-          <a:p>
-            <a:pPr lvl="0" indent="0" marL="0">
-              <a:buNone/>
-            </a:pPr>
-            <a:r>
-              <a:rPr/>
-              <a:t>Techniques — acceptance criteria (AC), non-functional requirements (NFRs), Service Level Objectives (SLOs), Azure DevOps (ADO), value stream mapping (VSM)</a:t>
-            </a:r>
-          </a:p>
-          <a:p>
-            <a:pPr lvl="0" indent="0" marL="0">
-              <a:buNone/>
-            </a:pPr>
-            <a:r>
-              <a:rPr/>
-              <a:t>Pattern Library — cumulative across Weeks 2–8</a:t>
-            </a:r>
-          </a:p>
-          <a:p>
-            <a:pPr lvl="0" indent="0" marL="0">
-              <a:buNone/>
-            </a:pPr>
-            <a:r>
-              <a:rPr/>
-              <a:t>“Next 90 days” reading list — 3–5 books / podcasts / talks</a:t>
-            </a:r>
-          </a:p>
-          <a:p>
-            <a:pPr lvl="0" indent="0" marL="0">
-              <a:buNone/>
-            </a:pPr>
-            <a:r>
-              <a:rPr/>
-              <a:t>Cohort connections for ongoing support</a:t>
-            </a:r>
-          </a:p>
-        </p:txBody>
-      </p:sp>
-    </p:spTree>
-  </p:cSld>
-</p:sld>
-</file>
-
-<file path=ppt/slides/slide16.xml><?xml version="1.0" encoding="utf-8"?>
-<p:sld xmlns:a="http://schemas.openxmlformats.org/drawingml/2006/main" xmlns:r="http://schemas.openxmlformats.org/officeDocument/2006/relationships" xmlns:p="http://schemas.openxmlformats.org/presentationml/2006/main">
-  <p:cSld>
-    <p:spTree>
-      <p:nvGrpSpPr>
-        <p:cNvPr id="1" name=""/>
-        <p:cNvGrpSpPr/>
-        <p:nvPr/>
-      </p:nvGrpSpPr>
-      <p:grpSpPr>
-        <a:xfrm>
-          <a:off x="0" y="0"/>
-          <a:ext cx="0" cy="0"/>
-          <a:chOff x="0" y="0"/>
-          <a:chExt cx="0" cy="0"/>
-        </a:xfrm>
-      </p:grpSpPr>
-      <p:sp>
-        <p:nvSpPr>
-          <p:cNvPr id="2" name="Title 1"/>
-          <p:cNvSpPr>
-            <a:spLocks noGrp="1"/>
-          </p:cNvSpPr>
-          <p:nvPr>
-            <p:ph type="title"/>
-          </p:nvPr>
-        </p:nvSpPr>
-        <p:spPr/>
-        <p:txBody>
-          <a:bodyPr/>
-          <a:lstStyle/>
-          <a:p>
-            <a:pPr lvl="0" indent="0" marL="0">
-              <a:buNone/>
-            </a:pPr>
-            <a:r>
-              <a:rPr/>
-              <a:t>💪 The 5 Muscles of the Academy</a:t>
-            </a:r>
-          </a:p>
-        </p:txBody>
-      </p:sp>
-      <p:sp>
-        <p:nvSpPr>
-          <p:cNvPr id="3" name="Content Placeholder 2"/>
-          <p:cNvSpPr>
-            <a:spLocks noGrp="1"/>
-          </p:cNvSpPr>
-          <p:nvPr>
-            <p:ph idx="1"/>
-          </p:nvPr>
-        </p:nvSpPr>
-        <p:spPr/>
-        <p:txBody>
-          <a:bodyPr/>
-          <a:lstStyle/>
-          <a:p>
-            <a:pPr lvl="0" indent="0" marL="0">
-              <a:buNone/>
-            </a:pPr>
-            <a:r>
-              <a:rPr/>
-              <a:t>Customer-centric</a:t>
-            </a:r>
-          </a:p>
-          <a:p>
-            <a:pPr lvl="0" indent="0" marL="0">
-              <a:buNone/>
-            </a:pPr>
-            <a:r>
-              <a:rPr/>
-              <a:t>(Wk 1) Personas, pain points, problem framing</a:t>
-            </a:r>
-          </a:p>
-          <a:p>
-            <a:pPr lvl="0" indent="0" marL="0">
-              <a:buNone/>
-            </a:pPr>
-            <a:r>
-              <a:rPr/>
-              <a:t>Strategic + measurable</a:t>
-            </a:r>
-          </a:p>
-          <a:p>
-            <a:pPr lvl="0" indent="0" marL="0">
-              <a:buNone/>
-            </a:pPr>
-            <a:r>
-              <a:rPr/>
-              <a:t>(Wk 2) NS, Tier Sheet, journey, design principles</a:t>
-            </a:r>
-          </a:p>
-          <a:p>
-            <a:pPr lvl="0" indent="0" marL="0">
-              <a:buNone/>
-            </a:pPr>
-            <a:r>
-              <a:rPr/>
-              <a:t>Engineering-readable</a:t>
-            </a:r>
-          </a:p>
-          <a:p>
-            <a:pPr lvl="0" indent="0" marL="0">
-              <a:buNone/>
-            </a:pPr>
-            <a:r>
-              <a:rPr/>
-              <a:t>(Wk 3 + 8) PRDs, AC, NFRs, AI Spec</a:t>
-            </a:r>
-          </a:p>
-          <a:p>
-            <a:pPr lvl="0" indent="0" marL="0">
-              <a:buNone/>
-            </a:pPr>
-            <a:r>
-              <a:rPr/>
-              <a:t>Architecturally aware</a:t>
-            </a:r>
-          </a:p>
-          <a:p>
-            <a:pPr lvl="0" indent="0" marL="0">
-              <a:buNone/>
-            </a:pPr>
-            <a:r>
-              <a:rPr/>
-              <a:t>(Wk 4 + 5) TCD, TMD, trade-offs, SLOs, sequences</a:t>
-            </a:r>
-          </a:p>
-          <a:p>
-            <a:pPr lvl="0" indent="0" marL="0">
-              <a:buNone/>
-            </a:pPr>
-            <a:r>
-              <a:rPr/>
-              <a:t>Stakeholder-fluent</a:t>
-            </a:r>
-          </a:p>
-          <a:p>
-            <a:pPr lvl="0" indent="0" marL="0">
-              <a:buNone/>
-            </a:pPr>
-            <a:r>
-              <a:rPr/>
-              <a:t>(Wk 6) Mapping, engagement, negotiation</a:t>
-            </a:r>
-          </a:p>
-          <a:p>
-            <a:pPr lvl="0" indent="0" marL="0">
-              <a:buNone/>
-            </a:pPr>
-            <a:r>
-              <a:rPr/>
-              <a:t>Delivery-disciplined</a:t>
-            </a:r>
-          </a:p>
-          <a:p>
-            <a:pPr lvl="0" indent="0" marL="0">
-              <a:buNone/>
-            </a:pPr>
-            <a:r>
-              <a:rPr/>
-              <a:t>(Wk 7) ADO, outcome tracking, VSM, bottlenecks</a:t>
-            </a:r>
-          </a:p>
-        </p:txBody>
-      </p:sp>
-    </p:spTree>
-  </p:cSld>
-</p:sld>
-</file>
-
-<file path=ppt/slides/slide17.xml><?xml version="1.0" encoding="utf-8"?>
-<p:sld xmlns:a="http://schemas.openxmlformats.org/drawingml/2006/main" xmlns:r="http://schemas.openxmlformats.org/officeDocument/2006/relationships" xmlns:p="http://schemas.openxmlformats.org/presentationml/2006/main">
-  <p:cSld>
-    <p:spTree>
-      <p:nvGrpSpPr>
-        <p:cNvPr id="1" name=""/>
-        <p:cNvGrpSpPr/>
-        <p:nvPr/>
-      </p:nvGrpSpPr>
-      <p:grpSpPr>
-        <a:xfrm>
-          <a:off x="0" y="0"/>
-          <a:ext cx="0" cy="0"/>
-          <a:chOff x="0" y="0"/>
-          <a:chExt cx="0" cy="0"/>
-        </a:xfrm>
-      </p:grpSpPr>
-      <p:sp>
-        <p:nvSpPr>
-          <p:cNvPr id="2" name="Title 1"/>
-          <p:cNvSpPr>
-            <a:spLocks noGrp="1"/>
-          </p:cNvSpPr>
-          <p:nvPr>
-            <p:ph type="title"/>
-          </p:nvPr>
-        </p:nvSpPr>
-        <p:spPr>
-          <a:xfrm>
-            <a:off x="722313" y="3305176"/>
-            <a:ext cx="7772400" cy="1021556"/>
-          </a:xfrm>
-        </p:spPr>
-        <p:txBody>
-          <a:bodyPr/>
-          <a:lstStyle/>
-          <a:p>
-            <a:pPr lvl="0" indent="0" marL="0">
-              <a:buNone/>
-            </a:pPr>
-            <a:r>
-              <a:rPr/>
-              <a:t>🏆 Congratulations, TPM Academy Cohort</a:t>
-            </a:r>
-          </a:p>
-        </p:txBody>
-      </p:sp>
-    </p:spTree>
-  </p:cSld>
-</p:sld>
-</file>
-
-<file path=ppt/slides/slide18.xml><?xml version="1.0" encoding="utf-8"?>
-<p:sld xmlns:a="http://schemas.openxmlformats.org/drawingml/2006/main" xmlns:r="http://schemas.openxmlformats.org/officeDocument/2006/relationships" xmlns:p="http://schemas.openxmlformats.org/presentationml/2006/main">
-  <p:cSld>
-    <p:spTree>
-      <p:nvGrpSpPr>
-        <p:cNvPr id="1" name=""/>
-        <p:cNvGrpSpPr/>
-        <p:nvPr/>
-      </p:nvGrpSpPr>
-      <p:grpSpPr>
-        <a:xfrm>
-          <a:off x="0" y="0"/>
-          <a:ext cx="0" cy="0"/>
-          <a:chOff x="0" y="0"/>
-          <a:chExt cx="0" cy="0"/>
-        </a:xfrm>
-      </p:grpSpPr>
-      <p:sp>
-        <p:nvSpPr>
-          <p:cNvPr id="2" name="Title 1"/>
-          <p:cNvSpPr>
-            <a:spLocks noGrp="1"/>
-          </p:cNvSpPr>
-          <p:nvPr>
-            <p:ph type="title"/>
-          </p:nvPr>
-        </p:nvSpPr>
-        <p:spPr/>
-        <p:txBody>
-          <a:bodyPr/>
-          <a:lstStyle/>
-          <a:p>
-            <a:pPr lvl="0" indent="0" marL="0">
-              <a:buNone/>
-            </a:pPr>
-            <a:r>
-              <a:rPr/>
-              <a:t>You shipped 5 sibling artifacts + an AI Spec + a capstone.</a:t>
-            </a:r>
-          </a:p>
-        </p:txBody>
-      </p:sp>
-      <p:sp>
-        <p:nvSpPr>
-          <p:cNvPr id="3" name="Content Placeholder 2"/>
-          <p:cNvSpPr>
-            <a:spLocks noGrp="1"/>
-          </p:cNvSpPr>
-          <p:nvPr>
-            <p:ph idx="1"/>
-          </p:nvPr>
-        </p:nvSpPr>
-        <p:spPr/>
-        <p:txBody>
-          <a:bodyPr/>
-          <a:lstStyle/>
-          <a:p>
-            <a:pPr lvl="0" indent="0" marL="0">
-              <a:spcBef>
-                <a:spcPts val="3000"/>
-              </a:spcBef>
-              <a:buNone/>
-            </a:pPr>
-            <a:r>
-              <a:rPr b="1"/>
-              <a:t>Take the muscles. Use the templates. Keep the discipline.</a:t>
-            </a:r>
-          </a:p>
-        </p:txBody>
-      </p:sp>
-    </p:spTree>
-  </p:cSld>
-</p:sld>
-</file>
-
-<file path=ppt/slides/slide19.xml><?xml version="1.0" encoding="utf-8"?>
-<p:sld xmlns:a="http://schemas.openxmlformats.org/drawingml/2006/main" xmlns:r="http://schemas.openxmlformats.org/officeDocument/2006/relationships" xmlns:p="http://schemas.openxmlformats.org/presentationml/2006/main">
-  <p:cSld>
-    <p:spTree>
-      <p:nvGrpSpPr>
-        <p:cNvPr id="1" name=""/>
-        <p:cNvGrpSpPr/>
-        <p:nvPr/>
-      </p:nvGrpSpPr>
-      <p:grpSpPr>
-        <a:xfrm>
-          <a:off x="0" y="0"/>
-          <a:ext cx="0" cy="0"/>
-          <a:chOff x="0" y="0"/>
-          <a:chExt cx="0" cy="0"/>
-        </a:xfrm>
-      </p:grpSpPr>
-      <p:sp>
-        <p:nvSpPr>
-          <p:cNvPr id="2" name="Title 1"/>
-          <p:cNvSpPr>
-            <a:spLocks noGrp="1"/>
-          </p:cNvSpPr>
-          <p:nvPr>
-            <p:ph type="title"/>
-          </p:nvPr>
-        </p:nvSpPr>
-        <p:spPr/>
-        <p:txBody>
-          <a:bodyPr/>
-          <a:lstStyle/>
-          <a:p>
-            <a:pPr lvl="0" indent="0" marL="0">
-              <a:buNone/>
-            </a:pPr>
-            <a:r>
-              <a:rPr/>
               <a:t>💬 Final Round-Robin</a:t>
             </a:r>
           </a:p>
@@ -5938,7 +5249,7 @@
             </a:pPr>
             <a:r>
               <a:rPr/>
-              <a:t>🎯 Day 5 Objectives</a:t>
+              <a:t>The Friday Rubric</a:t>
             </a:r>
           </a:p>
         </p:txBody>
@@ -5959,47 +5270,14 @@
           <a:lstStyle/>
           <a:p>
             <a:pPr lvl="0" indent="0" marL="0">
-              <a:buNone/>
-            </a:pPr>
-            <a:r>
-              <a:rPr/>
-              <a:t>Each quad presents their capstone (15 + 5 Q&amp;A)</a:t>
-            </a:r>
-          </a:p>
-          <a:p>
-            <a:pPr lvl="0" indent="0" marL="0">
-              <a:buNone/>
-            </a:pPr>
-            <a:r>
-              <a:rPr/>
-              <a:t>Cohort + instructors score on the rubric</a:t>
-            </a:r>
-          </a:p>
-          <a:p>
-            <a:pPr lvl="0" indent="0" marL="0">
-              <a:buNone/>
-            </a:pPr>
-            <a:r>
-              <a:rPr/>
-              <a:t>Cohort retrospective: surprises / keeping / retiring</a:t>
-            </a:r>
-          </a:p>
-          <a:p>
-            <a:pPr lvl="0" indent="0" marL="0">
-              <a:buNone/>
-            </a:pPr>
-            <a:r>
-              <a:rPr/>
-              <a:t>Post-assessments (Product Management + Data Literacy)</a:t>
-            </a:r>
-          </a:p>
-          <a:p>
-            <a:pPr lvl="0" indent="0" marL="0">
-              <a:buNone/>
-            </a:pPr>
-            <a:r>
-              <a:rPr/>
-              <a:t>Course closure: certificates, final round-robin</a:t>
+              <a:spcBef>
+                <a:spcPts val="3000"/>
+              </a:spcBef>
+              <a:buNone/>
+            </a:pPr>
+            <a:r>
+              <a:rPr b="1"/>
+              <a:t>Score on the rubric, not against other quads</a:t>
             </a:r>
           </a:p>
         </p:txBody>
@@ -6046,7 +5324,7 @@
             </a:pPr>
             <a:r>
               <a:rPr/>
-              <a:t>🕑 Today’s Cadence</a:t>
+              <a:t>📊 Friday Presentation Rubric</a:t>
             </a:r>
           </a:p>
         </p:txBody>
@@ -6071,160 +5349,151 @@
             </a:pPr>
             <a:r>
               <a:rPr/>
-              <a:t>Clock</a:t>
-            </a:r>
-          </a:p>
-          <a:p>
-            <a:pPr lvl="0" indent="0" marL="0">
-              <a:buNone/>
-            </a:pPr>
-            <a:r>
-              <a:rPr/>
-              <a:t>Block</a:t>
-            </a:r>
-          </a:p>
-          <a:p>
-            <a:pPr lvl="0" indent="0" marL="0">
-              <a:buNone/>
-            </a:pPr>
-            <a:r>
-              <a:rPr/>
-              <a:t>09:00 – 09:30</a:t>
-            </a:r>
-          </a:p>
-          <a:p>
-            <a:pPr lvl="0" indent="0" marL="0">
-              <a:buNone/>
-            </a:pPr>
-            <a:r>
-              <a:rPr/>
-              <a:t>Opening; presentation order; rubric review</a:t>
-            </a:r>
-          </a:p>
-          <a:p>
-            <a:pPr lvl="0" indent="0" marL="0">
-              <a:buNone/>
-            </a:pPr>
-            <a:r>
-              <a:rPr/>
-              <a:t>09:30 – 10:50</a:t>
-            </a:r>
-          </a:p>
-          <a:p>
-            <a:pPr lvl="0" indent="0" marL="0">
-              <a:buNone/>
-            </a:pPr>
-            <a:r>
-              <a:rPr/>
-              <a:t>Quads 1 + 2 present</a:t>
-            </a:r>
-          </a:p>
-          <a:p>
-            <a:pPr lvl="0" indent="0" marL="0">
-              <a:buNone/>
-            </a:pPr>
-            <a:r>
-              <a:rPr/>
-              <a:t>10:50 – 11:05</a:t>
-            </a:r>
-          </a:p>
-          <a:p>
-            <a:pPr lvl="0" indent="0" marL="0">
-              <a:buNone/>
-            </a:pPr>
-            <a:r>
-              <a:rPr/>
-              <a:t>Break</a:t>
-            </a:r>
-          </a:p>
-          <a:p>
-            <a:pPr lvl="0" indent="0" marL="0">
-              <a:buNone/>
-            </a:pPr>
-            <a:r>
-              <a:rPr/>
-              <a:t>11:05 – 12:25</a:t>
-            </a:r>
-          </a:p>
-          <a:p>
-            <a:pPr lvl="0" indent="0" marL="0">
-              <a:buNone/>
-            </a:pPr>
-            <a:r>
-              <a:rPr/>
-              <a:t>Quads 3 + 4 present</a:t>
-            </a:r>
-          </a:p>
-          <a:p>
-            <a:pPr lvl="0" indent="0" marL="0">
-              <a:buNone/>
-            </a:pPr>
-            <a:r>
-              <a:rPr/>
-              <a:t>12:25 – 13:25</a:t>
-            </a:r>
-          </a:p>
-          <a:p>
-            <a:pPr lvl="0" indent="0" marL="0">
-              <a:buNone/>
-            </a:pPr>
-            <a:r>
-              <a:rPr/>
-              <a:t>Lunch</a:t>
-            </a:r>
-          </a:p>
-          <a:p>
-            <a:pPr lvl="0" indent="0" marL="0">
-              <a:buNone/>
-            </a:pPr>
-            <a:r>
-              <a:rPr/>
-              <a:t>13:25 – 14:45</a:t>
-            </a:r>
-          </a:p>
-          <a:p>
-            <a:pPr lvl="0" indent="0" marL="0">
-              <a:buNone/>
-            </a:pPr>
-            <a:r>
-              <a:rPr/>
-              <a:t>Quads 5 + 6 present</a:t>
-            </a:r>
-          </a:p>
-          <a:p>
-            <a:pPr lvl="0" indent="0" marL="0">
-              <a:buNone/>
-            </a:pPr>
-            <a:r>
-              <a:rPr/>
-              <a:t>14:45 – 15:15</a:t>
-            </a:r>
-          </a:p>
-          <a:p>
-            <a:pPr lvl="0" indent="0" marL="0">
-              <a:buNone/>
-            </a:pPr>
-            <a:r>
-              <a:rPr/>
-              <a:t>Cohort retrospective</a:t>
-            </a:r>
-          </a:p>
-          <a:p>
-            <a:pPr lvl="0" indent="0" marL="0">
-              <a:buNone/>
-            </a:pPr>
-            <a:r>
-              <a:rPr/>
-              <a:t>15:15 – 16:00</a:t>
-            </a:r>
-          </a:p>
-          <a:p>
-            <a:pPr lvl="0" indent="0" marL="0">
-              <a:buNone/>
-            </a:pPr>
-            <a:r>
-              <a:rPr/>
-              <a:t>Course closure: post-assessments, certificates, wrap</a:t>
+              <a:t>Dimension</a:t>
+            </a:r>
+          </a:p>
+          <a:p>
+            <a:pPr lvl="0" indent="0" marL="0">
+              <a:buNone/>
+            </a:pPr>
+            <a:r>
+              <a:rPr/>
+              <a:t>Weight</a:t>
+            </a:r>
+          </a:p>
+          <a:p>
+            <a:pPr lvl="0" indent="0" marL="0">
+              <a:buNone/>
+            </a:pPr>
+            <a:r>
+              <a:rPr/>
+              <a:t>Customer + problem clarity</a:t>
+            </a:r>
+          </a:p>
+          <a:p>
+            <a:pPr lvl="0" indent="0" marL="0">
+              <a:buNone/>
+            </a:pPr>
+            <a:r>
+              <a:rPr/>
+              <a:t>15%</a:t>
+            </a:r>
+          </a:p>
+          <a:p>
+            <a:pPr lvl="0" indent="0" marL="0">
+              <a:buNone/>
+            </a:pPr>
+            <a:r>
+              <a:rPr/>
+              <a:t>Integrated artifact set</a:t>
+            </a:r>
+          </a:p>
+          <a:p>
+            <a:pPr lvl="0" indent="0" marL="0">
+              <a:buNone/>
+            </a:pPr>
+            <a:r>
+              <a:rPr/>
+              <a:t>15%</a:t>
+            </a:r>
+          </a:p>
+          <a:p>
+            <a:pPr lvl="0" indent="0" marL="0">
+              <a:buNone/>
+            </a:pPr>
+            <a:r>
+              <a:rPr/>
+              <a:t>AI Spec quality</a:t>
+            </a:r>
+          </a:p>
+          <a:p>
+            <a:pPr lvl="0" indent="0" marL="0">
+              <a:buNone/>
+            </a:pPr>
+            <a:r>
+              <a:rPr/>
+              <a:t>20%</a:t>
+            </a:r>
+          </a:p>
+          <a:p>
+            <a:pPr lvl="0" indent="0" marL="0">
+              <a:buNone/>
+            </a:pPr>
+            <a:r>
+              <a:rPr/>
+              <a:t>Trade-off honesty</a:t>
+            </a:r>
+          </a:p>
+          <a:p>
+            <a:pPr lvl="0" indent="0" marL="0">
+              <a:buNone/>
+            </a:pPr>
+            <a:r>
+              <a:rPr/>
+              <a:t>15%</a:t>
+            </a:r>
+          </a:p>
+          <a:p>
+            <a:pPr lvl="0" indent="0" marL="0">
+              <a:buNone/>
+            </a:pPr>
+            <a:r>
+              <a:rPr/>
+              <a:t>Outcome thinking</a:t>
+            </a:r>
+          </a:p>
+          <a:p>
+            <a:pPr lvl="0" indent="0" marL="0">
+              <a:buNone/>
+            </a:pPr>
+            <a:r>
+              <a:rPr/>
+              <a:t>10%</a:t>
+            </a:r>
+          </a:p>
+          <a:p>
+            <a:pPr lvl="0" indent="0" marL="0">
+              <a:buNone/>
+            </a:pPr>
+            <a:r>
+              <a:rPr/>
+              <a:t>Delivery readiness</a:t>
+            </a:r>
+          </a:p>
+          <a:p>
+            <a:pPr lvl="0" indent="0" marL="0">
+              <a:buNone/>
+            </a:pPr>
+            <a:r>
+              <a:rPr/>
+              <a:t>10%</a:t>
+            </a:r>
+          </a:p>
+          <a:p>
+            <a:pPr lvl="0" indent="0" marL="0">
+              <a:buNone/>
+            </a:pPr>
+            <a:r>
+              <a:rPr/>
+              <a:t>Presentation craft</a:t>
+            </a:r>
+          </a:p>
+          <a:p>
+            <a:pPr lvl="0" indent="0" marL="0">
+              <a:buNone/>
+            </a:pPr>
+            <a:r>
+              <a:rPr/>
+              <a:t>15%</a:t>
+            </a:r>
+          </a:p>
+          <a:p>
+            <a:pPr lvl="0" indent="0" marL="0">
+              <a:buNone/>
+            </a:pPr>
+            <a:r>
+              <a:rPr/>
+              <a:t>Score 0–4 per dimension.</a:t>
             </a:r>
           </a:p>
         </p:txBody>
@@ -6271,7 +5540,7 @@
             </a:pPr>
             <a:r>
               <a:rPr/>
-              <a:t>The Friday Rubric</a:t>
+              <a:t>The Presentations</a:t>
             </a:r>
           </a:p>
         </p:txBody>
@@ -6299,7 +5568,7 @@
             </a:pPr>
             <a:r>
               <a:rPr b="1"/>
-              <a:t>Score on the rubric, not against other quads</a:t>
+              <a:t>15 minutes + 5 Q&amp;A per quad</a:t>
             </a:r>
           </a:p>
         </p:txBody>
@@ -6346,7 +5615,7 @@
             </a:pPr>
             <a:r>
               <a:rPr/>
-              <a:t>📊 Friday Presentation Rubric</a:t>
+              <a:t>✅ Cohort Scoring Discipline</a:t>
             </a:r>
           </a:p>
         </p:txBody>
@@ -6371,151 +5640,43 @@
             </a:pPr>
             <a:r>
               <a:rPr/>
-              <a:t>Dimension</a:t>
-            </a:r>
-          </a:p>
-          <a:p>
-            <a:pPr lvl="0" indent="0" marL="0">
-              <a:buNone/>
-            </a:pPr>
-            <a:r>
-              <a:rPr/>
-              <a:t>Weight</a:t>
-            </a:r>
-          </a:p>
-          <a:p>
-            <a:pPr lvl="0" indent="0" marL="0">
-              <a:buNone/>
-            </a:pPr>
-            <a:r>
-              <a:rPr/>
-              <a:t>Customer + problem clarity</a:t>
-            </a:r>
-          </a:p>
-          <a:p>
-            <a:pPr lvl="0" indent="0" marL="0">
-              <a:buNone/>
-            </a:pPr>
-            <a:r>
-              <a:rPr/>
-              <a:t>15%</a:t>
-            </a:r>
-          </a:p>
-          <a:p>
-            <a:pPr lvl="0" indent="0" marL="0">
-              <a:buNone/>
-            </a:pPr>
-            <a:r>
-              <a:rPr/>
-              <a:t>Integrated artifact set</a:t>
-            </a:r>
-          </a:p>
-          <a:p>
-            <a:pPr lvl="0" indent="0" marL="0">
-              <a:buNone/>
-            </a:pPr>
-            <a:r>
-              <a:rPr/>
-              <a:t>15%</a:t>
-            </a:r>
-          </a:p>
-          <a:p>
-            <a:pPr lvl="0" indent="0" marL="0">
-              <a:buNone/>
-            </a:pPr>
-            <a:r>
-              <a:rPr/>
-              <a:t>AI Spec quality</a:t>
-            </a:r>
-          </a:p>
-          <a:p>
-            <a:pPr lvl="0" indent="0" marL="0">
-              <a:buNone/>
-            </a:pPr>
-            <a:r>
-              <a:rPr/>
-              <a:t>20%</a:t>
-            </a:r>
-          </a:p>
-          <a:p>
-            <a:pPr lvl="0" indent="0" marL="0">
-              <a:buNone/>
-            </a:pPr>
-            <a:r>
-              <a:rPr/>
-              <a:t>Trade-off honesty</a:t>
-            </a:r>
-          </a:p>
-          <a:p>
-            <a:pPr lvl="0" indent="0" marL="0">
-              <a:buNone/>
-            </a:pPr>
-            <a:r>
-              <a:rPr/>
-              <a:t>15%</a:t>
-            </a:r>
-          </a:p>
-          <a:p>
-            <a:pPr lvl="0" indent="0" marL="0">
-              <a:buNone/>
-            </a:pPr>
-            <a:r>
-              <a:rPr/>
-              <a:t>Outcome thinking</a:t>
-            </a:r>
-          </a:p>
-          <a:p>
-            <a:pPr lvl="0" indent="0" marL="0">
-              <a:buNone/>
-            </a:pPr>
-            <a:r>
-              <a:rPr/>
-              <a:t>10%</a:t>
-            </a:r>
-          </a:p>
-          <a:p>
-            <a:pPr lvl="0" indent="0" marL="0">
-              <a:buNone/>
-            </a:pPr>
-            <a:r>
-              <a:rPr/>
-              <a:t>Delivery readiness</a:t>
-            </a:r>
-          </a:p>
-          <a:p>
-            <a:pPr lvl="0" indent="0" marL="0">
-              <a:buNone/>
-            </a:pPr>
-            <a:r>
-              <a:rPr/>
-              <a:t>10%</a:t>
-            </a:r>
-          </a:p>
-          <a:p>
-            <a:pPr lvl="0" indent="0" marL="0">
-              <a:buNone/>
-            </a:pPr>
-            <a:r>
-              <a:rPr/>
-              <a:t>Presentation craft</a:t>
-            </a:r>
-          </a:p>
-          <a:p>
-            <a:pPr lvl="0" indent="0" marL="0">
-              <a:buNone/>
-            </a:pPr>
-            <a:r>
-              <a:rPr/>
-              <a:t>15%</a:t>
-            </a:r>
-          </a:p>
-          <a:p>
-            <a:pPr lvl="0" indent="0" marL="0">
-              <a:buNone/>
-            </a:pPr>
-            <a:r>
-              <a:rPr/>
-              <a:t>Score 0–4 per dimension. Final = (peer mean + instructor) / 2.</a:t>
+              <a:t>Score during the presentation, not after</a:t>
+            </a:r>
+          </a:p>
+          <a:p>
+            <a:pPr lvl="0" indent="0" marL="0">
+              <a:buNone/>
+            </a:pPr>
+            <a:r>
+              <a:rPr/>
+              <a:t>Specific notes per dimension</a:t>
+            </a:r>
+          </a:p>
+          <a:p>
+            <a:pPr lvl="0" indent="0" marL="0">
+              <a:buNone/>
+            </a:pPr>
+            <a:r>
+              <a:rPr/>
+              <a:t>Whole-number scores; no half-points</a:t>
+            </a:r>
+          </a:p>
+          <a:p>
+            <a:pPr lvl="0" indent="0" marL="0">
+              <a:buNone/>
+            </a:pPr>
+            <a:r>
+              <a:rPr/>
+              <a:t>Score against the rubric, not against other quads</a:t>
+            </a:r>
+          </a:p>
+          <a:p>
+            <a:pPr lvl="0" indent="0" marL="0">
+              <a:buNone/>
+            </a:pPr>
+            <a:r>
+              <a:rPr/>
+              <a:t>Don’t grade on a curve. If two quads score 3.5, both are 3.5.</a:t>
             </a:r>
           </a:p>
         </p:txBody>
@@ -6562,7 +5723,7 @@
             </a:pPr>
             <a:r>
               <a:rPr/>
-              <a:t>🗣️ Q&amp;A Discipline (for presenters)</a:t>
+              <a:t>Cohort Retrospective</a:t>
             </a:r>
           </a:p>
         </p:txBody>
@@ -6583,119 +5744,14 @@
           <a:lstStyle/>
           <a:p>
             <a:pPr lvl="0" indent="0" marL="0">
-              <a:buNone/>
-            </a:pPr>
-            <a:r>
-              <a:rPr/>
-              <a:t>When asked</a:t>
-            </a:r>
-          </a:p>
-          <a:p>
-            <a:pPr lvl="0" indent="0" marL="0">
-              <a:buNone/>
-            </a:pPr>
-            <a:r>
-              <a:rPr/>
-              <a:t>Do this</a:t>
-            </a:r>
-          </a:p>
-          <a:p>
-            <a:pPr lvl="0" indent="0" marL="0">
-              <a:buNone/>
-            </a:pPr>
-            <a:r>
-              <a:rPr/>
-              <a:t>Specific Q you can answer</a:t>
-            </a:r>
-          </a:p>
-          <a:p>
-            <a:pPr lvl="0" indent="0" marL="0">
-              <a:buNone/>
-            </a:pPr>
-            <a:r>
-              <a:rPr/>
-              <a:t>Crisp answer &lt; 90 sec</a:t>
-            </a:r>
-          </a:p>
-          <a:p>
-            <a:pPr lvl="0" indent="0" marL="0">
-              <a:buNone/>
-            </a:pPr>
-            <a:r>
-              <a:rPr/>
-              <a:t>Specific Q you can’t answer</a:t>
-            </a:r>
-          </a:p>
-          <a:p>
-            <a:pPr lvl="0" indent="0" marL="0">
-              <a:buNone/>
-            </a:pPr>
-            <a:r>
-              <a:rPr/>
-              <a:t>“Honestly, I don’t know — here’s what we’d do to find out”</a:t>
-            </a:r>
-          </a:p>
-          <a:p>
-            <a:pPr lvl="0" indent="0" marL="0">
-              <a:buNone/>
-            </a:pPr>
-            <a:r>
-              <a:rPr/>
-              <a:t>Challenge to a decision</a:t>
-            </a:r>
-          </a:p>
-          <a:p>
-            <a:pPr lvl="0" indent="0" marL="0">
-              <a:buNone/>
-            </a:pPr>
-            <a:r>
-              <a:rPr/>
-              <a:t>Restate decision + trade-off + revisit trigger</a:t>
-            </a:r>
-          </a:p>
-          <a:p>
-            <a:pPr lvl="0" indent="0" marL="0">
-              <a:buNone/>
-            </a:pPr>
-            <a:r>
-              <a:rPr/>
-              <a:t>Out-of-scope Q</a:t>
-            </a:r>
-          </a:p>
-          <a:p>
-            <a:pPr lvl="0" indent="0" marL="0">
-              <a:buNone/>
-            </a:pPr>
-            <a:r>
-              <a:rPr/>
-              <a:t>Acknowledge; reference non-goals (PRD-light §3) / “explicitly NOT”</a:t>
-            </a:r>
-          </a:p>
-          <a:p>
-            <a:pPr lvl="0" indent="0" marL="0">
-              <a:buNone/>
-            </a:pPr>
-            <a:r>
-              <a:rPr/>
-              <a:t>Hostile Q</a:t>
-            </a:r>
-          </a:p>
-          <a:p>
-            <a:pPr lvl="0" indent="0" marL="0">
-              <a:buNone/>
-            </a:pPr>
-            <a:r>
-              <a:rPr/>
-              <a:t>Curiosity. “What concern would that address?”</a:t>
-            </a:r>
-          </a:p>
-          <a:p>
-            <a:pPr lvl="0" indent="0" marL="0">
-              <a:buNone/>
-            </a:pPr>
-            <a:r>
-              <a:rPr/>
-              <a:t>Curiosity, not defensiveness. Quads who handle Q&amp;A with curiosity score high on presentation craft.</a:t>
+              <a:spcBef>
+                <a:spcPts val="3000"/>
+              </a:spcBef>
+              <a:buNone/>
+            </a:pPr>
+            <a:r>
+              <a:rPr b="1"/>
+              <a:t>30 minutes; 3 rounds</a:t>
             </a:r>
           </a:p>
         </p:txBody>
@@ -6742,7 +5798,7 @@
             </a:pPr>
             <a:r>
               <a:rPr/>
-              <a:t>The Presentations</a:t>
+              <a:t>📚 The 3 Retrospective Rounds</a:t>
             </a:r>
           </a:p>
         </p:txBody>
@@ -6763,14 +5819,38 @@
           <a:lstStyle/>
           <a:p>
             <a:pPr lvl="0" indent="0" marL="0">
-              <a:spcBef>
-                <a:spcPts val="3000"/>
-              </a:spcBef>
-              <a:buNone/>
-            </a:pPr>
-            <a:r>
-              <a:rPr b="1"/>
-              <a:t>15 minutes + 5 Q&amp;A per quad</a:t>
+              <a:buNone/>
+            </a:pPr>
+            <a:r>
+              <a:rPr/>
+              <a:t>What surprised you? One thing each — content, process, yourself</a:t>
+            </a:r>
+          </a:p>
+          <a:p>
+            <a:pPr lvl="0" indent="0" marL="0">
+              <a:buNone/>
+            </a:pPr>
+            <a:r>
+              <a:rPr/>
+              <a:t>What muscles are you keeping? 2 muscles each</a:t>
+            </a:r>
+          </a:p>
+          <a:p>
+            <a:pPr lvl="0" indent="0" marL="0">
+              <a:buNone/>
+            </a:pPr>
+            <a:r>
+              <a:rPr/>
+              <a:t>What habit are you retiring? 1 habit each</a:t>
+            </a:r>
+          </a:p>
+          <a:p>
+            <a:pPr lvl="0" indent="0" marL="0">
+              <a:buNone/>
+            </a:pPr>
+            <a:r>
+              <a:rPr/>
+              <a:t>Three artifact lists for the cohort to take with them.</a:t>
             </a:r>
           </a:p>
         </p:txBody>
@@ -6817,7 +5897,7 @@
             </a:pPr>
             <a:r>
               <a:rPr/>
-              <a:t>🎤 Presentation Slot Structure</a:t>
+              <a:t>Course Closure</a:t>
             </a:r>
           </a:p>
         </p:txBody>
@@ -6838,29 +5918,14 @@
           <a:lstStyle/>
           <a:p>
             <a:pPr lvl="0" indent="0" marL="0">
-              <a:buNone/>
-            </a:pPr>
-            <a:r>
-              <a:rPr/>
-              <a:t>15 minutes presentation (timer enforced)</a:t>
-            </a:r>
-          </a:p>
-          <a:p>
-            <a:pPr lvl="0" indent="0" marL="0">
-              <a:buNone/>
-            </a:pPr>
-            <a:r>
-              <a:rPr/>
-              <a:t>5 minutes Q&amp;A (instructors lead)</a:t>
-            </a:r>
-          </a:p>
-          <a:p>
-            <a:pPr lvl="0" indent="0" marL="0">
-              <a:buNone/>
-            </a:pPr>
-            <a:r>
-              <a:rPr/>
-              <a:t>All 3 quad voices speak. Time-managed. Customer + problem grounds the rest.</a:t>
+              <a:spcBef>
+                <a:spcPts val="3000"/>
+              </a:spcBef>
+              <a:buNone/>
+            </a:pPr>
+            <a:r>
+              <a:rPr b="1"/>
+              <a:t>45 minutes</a:t>
             </a:r>
           </a:p>
         </p:txBody>
